--- a/data/sites/sales/Customer Success/customer-health-renewal-and-expansion-deck.pptx
+++ b/data/sites/sales/Customer Success/customer-health-renewal-and-expansion-deck.pptx
@@ -15,8 +15,6 @@
     <p:sldId id="263" r:id="rId14"/>
     <p:sldId id="264" r:id="rId15"/>
     <p:sldId id="265" r:id="rId16"/>
-    <p:sldId id="266" r:id="rId17"/>
-    <p:sldId id="267" r:id="rId18"/>
   </p:sldIdLst>
   <p:sldSz cx="12191695" cy="6858000" type="screen4x3"/>
   <p:notesSz cx="6858000" cy="9144000"/>
@@ -3493,7 +3491,7 @@
           <a:lstStyle/>
           <a:p>
             <a:r>
-              <a:t>10. Cross-Functional Dependencies - Customer Health, Renewal and Expansi</a:t>
+              <a:t>10. Appendix, Lineage &amp; Sign-off - Customer Health, Renewal and Expansi</a:t>
             </a:r>
           </a:p>
         </p:txBody>
@@ -3514,7 +3512,7 @@
           <a:lstStyle/>
           <a:p>
             <a:r>
-              <a:t>Twelve-slide customer success review deck covering onboarding time-to-value, telemetry health scoring, save-play execution, and NRR expansion. Section 10 (Cross-Functional Dependencies) applies to Customer Success within Sales &amp; Marketing Knowledge Hub and is maintained by Tom Bergstrom. Documents upstream and downstream team dependencies and service-level commitments.</a:t>
+              <a:t>Twelve-slide customer success review deck covering onboarding time-to-value, telemetry health scoring, save-play execution, and NRR expansion. Section 10 (Appendix, Lineage &amp; Sign-off) applies to Customer Success within Sales &amp; Marketing Knowledge Hub and is maintained by Tom Bergstrom. Records document lineage, governance metadata, version history, and owner sign-off.</a:t>
             </a:r>
           </a:p>
           <a:p>
@@ -3865,886 +3863,6 @@
                       </a:pPr>
                       <a:r>
                         <a:t>Stage 10 Verified</a:t>
-                      </a:r>
-                    </a:p>
-                  </a:txBody>
-                  <a:tcPr/>
-                </a:tc>
-              </a:tr>
-            </a:tbl>
-          </a:graphicData>
-        </a:graphic>
-      </p:graphicFrame>
-      <p:pic>
-        <p:nvPicPr>
-          <p:cNvPr id="5" name="Picture 4" descr="image.png"/>
-          <p:cNvPicPr>
-            <a:picLocks noChangeAspect="1"/>
-          </p:cNvPicPr>
-          <p:nvPr/>
-        </p:nvPicPr>
-        <p:blipFill>
-          <a:blip r:embed="rId2"/>
-          <a:stretch>
-            <a:fillRect/>
-          </a:stretch>
-        </p:blipFill>
-        <p:spPr>
-          <a:xfrm>
-            <a:off x="6492240" y="3703320"/>
-            <a:ext cx="5120640" cy="1828800"/>
-          </a:xfrm>
-          <a:prstGeom prst="rect">
-            <a:avLst/>
-          </a:prstGeom>
-        </p:spPr>
-      </p:pic>
-    </p:spTree>
-  </p:cSld>
-  <p:clrMapOvr>
-    <a:masterClrMapping/>
-  </p:clrMapOvr>
-</p:sld>
-</file>
-
-<file path=ppt/slides/slide11.xml><?xml version="1.0" encoding="utf-8"?>
-<p:sld xmlns:a="http://schemas.openxmlformats.org/drawingml/2006/main" xmlns:p="http://schemas.openxmlformats.org/presentationml/2006/main" xmlns:r="http://schemas.openxmlformats.org/officeDocument/2006/relationships">
-  <p:cSld>
-    <p:spTree>
-      <p:nvGrpSpPr>
-        <p:cNvPr id="1" name=""/>
-        <p:cNvGrpSpPr/>
-        <p:nvPr/>
-      </p:nvGrpSpPr>
-      <p:grpSpPr/>
-      <p:sp>
-        <p:nvSpPr>
-          <p:cNvPr id="2" name="Title 1"/>
-          <p:cNvSpPr>
-            <a:spLocks noGrp="1"/>
-          </p:cNvSpPr>
-          <p:nvPr>
-            <p:ph type="title"/>
-          </p:nvPr>
-        </p:nvSpPr>
-        <p:spPr/>
-        <p:txBody>
-          <a:bodyPr/>
-          <a:lstStyle/>
-          <a:p>
-            <a:r>
-              <a:t>11. Continuous Improvement Roadmap - Customer Health, Renewal and Expansi</a:t>
-            </a:r>
-          </a:p>
-        </p:txBody>
-      </p:sp>
-      <p:sp>
-        <p:nvSpPr>
-          <p:cNvPr id="3" name="Content Placeholder 2"/>
-          <p:cNvSpPr>
-            <a:spLocks noGrp="1"/>
-          </p:cNvSpPr>
-          <p:nvPr>
-            <p:ph idx="1"/>
-          </p:nvPr>
-        </p:nvSpPr>
-        <p:spPr/>
-        <p:txBody>
-          <a:bodyPr/>
-          <a:lstStyle/>
-          <a:p>
-            <a:r>
-              <a:t>Twelve-slide customer success review deck covering onboarding time-to-value, telemetry health scoring, save-play execution, and NRR expansion. Section 11 (Continuous Improvement Roadmap) applies to Customer Success within Sales &amp; Marketing Knowledge Hub and is maintained by Tom Bergstrom. Schedules quarterly optimization milestones, automation targets, and capability reviews.</a:t>
-            </a:r>
-          </a:p>
-          <a:p>
-            <a:pPr lvl="1"/>
-            <a:r>
-              <a:t>Details executive sponsor save plays for accounts showing &gt;25% usage decline.</a:t>
-            </a:r>
-          </a:p>
-          <a:p>
-            <a:pPr lvl="1"/>
-            <a:r>
-              <a:t>Highlights QBR expansion playbooks driving 114% net dollar retention.</a:t>
-            </a:r>
-          </a:p>
-          <a:p>
-            <a:pPr lvl="1"/>
-            <a:r>
-              <a:t>Section 11 review cadence is tracked by Tom Bergstrom under Customer Success governance.</a:t>
-            </a:r>
-          </a:p>
-        </p:txBody>
-      </p:sp>
-      <p:graphicFrame>
-        <p:nvGraphicFramePr>
-          <p:cNvPr id="4" name="Table 3"/>
-          <p:cNvGraphicFramePr>
-            <a:graphicFrameLocks noGrp="1"/>
-          </p:cNvGraphicFramePr>
-          <p:nvPr/>
-        </p:nvGraphicFramePr>
-        <p:xfrm>
-          <a:off x="548640" y="3749039"/>
-          <a:ext cx="5669280" cy="1737360"/>
-        </p:xfrm>
-        <a:graphic>
-          <a:graphicData uri="http://schemas.openxmlformats.org/drawingml/2006/table">
-            <a:tbl>
-              <a:tblPr firstRow="1" bandRow="1">
-                <a:tableStyleId>{5C22544A-7EE6-4342-B048-85BDC9FD1C3A}</a:tableStyleId>
-              </a:tblPr>
-              <a:tblGrid>
-                <a:gridCol w="1417320"/>
-                <a:gridCol w="1417320"/>
-                <a:gridCol w="1417320"/>
-                <a:gridCol w="1417320"/>
-              </a:tblGrid>
-              <a:tr h="347472">
-                <a:tc>
-                  <a:txBody>
-                    <a:bodyPr/>
-                    <a:lstStyle/>
-                    <a:p>
-                      <a:pPr>
-                        <a:defRPr b="1" sz="1100"/>
-                      </a:pPr>
-                      <a:r>
-                        <a:t>Segment</a:t>
-                      </a:r>
-                    </a:p>
-                  </a:txBody>
-                  <a:tcPr/>
-                </a:tc>
-                <a:tc>
-                  <a:txBody>
-                    <a:bodyPr/>
-                    <a:lstStyle/>
-                    <a:p>
-                      <a:pPr>
-                        <a:defRPr b="1" sz="1100"/>
-                      </a:pPr>
-                      <a:r>
-                        <a:t>Gross Retention</a:t>
-                      </a:r>
-                    </a:p>
-                  </a:txBody>
-                  <a:tcPr/>
-                </a:tc>
-                <a:tc>
-                  <a:txBody>
-                    <a:bodyPr/>
-                    <a:lstStyle/>
-                    <a:p>
-                      <a:pPr>
-                        <a:defRPr b="1" sz="1100"/>
-                      </a:pPr>
-                      <a:r>
-                        <a:t>Net Retention (NRR)</a:t>
-                      </a:r>
-                    </a:p>
-                  </a:txBody>
-                  <a:tcPr/>
-                </a:tc>
-                <a:tc>
-                  <a:txBody>
-                    <a:bodyPr/>
-                    <a:lstStyle/>
-                    <a:p>
-                      <a:pPr>
-                        <a:defRPr b="1" sz="1100"/>
-                      </a:pPr>
-                      <a:r>
-                        <a:t>Avg Time to Value</a:t>
-                      </a:r>
-                    </a:p>
-                  </a:txBody>
-                  <a:tcPr/>
-                </a:tc>
-              </a:tr>
-              <a:tr h="347472">
-                <a:tc>
-                  <a:txBody>
-                    <a:bodyPr/>
-                    <a:lstStyle/>
-                    <a:p>
-                      <a:pPr>
-                        <a:defRPr sz="1000"/>
-                      </a:pPr>
-                      <a:r>
-                        <a:t>Enterprise</a:t>
-                      </a:r>
-                    </a:p>
-                  </a:txBody>
-                  <a:tcPr/>
-                </a:tc>
-                <a:tc>
-                  <a:txBody>
-                    <a:bodyPr/>
-                    <a:lstStyle/>
-                    <a:p>
-                      <a:pPr>
-                        <a:defRPr sz="1000"/>
-                      </a:pPr>
-                      <a:r>
-                        <a:t>94%</a:t>
-                      </a:r>
-                    </a:p>
-                  </a:txBody>
-                  <a:tcPr/>
-                </a:tc>
-                <a:tc>
-                  <a:txBody>
-                    <a:bodyPr/>
-                    <a:lstStyle/>
-                    <a:p>
-                      <a:pPr>
-                        <a:defRPr sz="1000"/>
-                      </a:pPr>
-                      <a:r>
-                        <a:t>118%</a:t>
-                      </a:r>
-                    </a:p>
-                  </a:txBody>
-                  <a:tcPr/>
-                </a:tc>
-                <a:tc>
-                  <a:txBody>
-                    <a:bodyPr/>
-                    <a:lstStyle/>
-                    <a:p>
-                      <a:pPr>
-                        <a:defRPr sz="1000"/>
-                      </a:pPr>
-                      <a:r>
-                        <a:t>28 days</a:t>
-                      </a:r>
-                    </a:p>
-                  </a:txBody>
-                  <a:tcPr/>
-                </a:tc>
-              </a:tr>
-              <a:tr h="347472">
-                <a:tc>
-                  <a:txBody>
-                    <a:bodyPr/>
-                    <a:lstStyle/>
-                    <a:p>
-                      <a:pPr>
-                        <a:defRPr sz="1000"/>
-                      </a:pPr>
-                      <a:r>
-                        <a:t>Mid-Market</a:t>
-                      </a:r>
-                    </a:p>
-                  </a:txBody>
-                  <a:tcPr/>
-                </a:tc>
-                <a:tc>
-                  <a:txBody>
-                    <a:bodyPr/>
-                    <a:lstStyle/>
-                    <a:p>
-                      <a:pPr>
-                        <a:defRPr sz="1000"/>
-                      </a:pPr>
-                      <a:r>
-                        <a:t>91%</a:t>
-                      </a:r>
-                    </a:p>
-                  </a:txBody>
-                  <a:tcPr/>
-                </a:tc>
-                <a:tc>
-                  <a:txBody>
-                    <a:bodyPr/>
-                    <a:lstStyle/>
-                    <a:p>
-                      <a:pPr>
-                        <a:defRPr sz="1000"/>
-                      </a:pPr>
-                      <a:r>
-                        <a:t>111%</a:t>
-                      </a:r>
-                    </a:p>
-                  </a:txBody>
-                  <a:tcPr/>
-                </a:tc>
-                <a:tc>
-                  <a:txBody>
-                    <a:bodyPr/>
-                    <a:lstStyle/>
-                    <a:p>
-                      <a:pPr>
-                        <a:defRPr sz="1000"/>
-                      </a:pPr>
-                      <a:r>
-                        <a:t>19 days</a:t>
-                      </a:r>
-                    </a:p>
-                  </a:txBody>
-                  <a:tcPr/>
-                </a:tc>
-              </a:tr>
-              <a:tr h="347472">
-                <a:tc>
-                  <a:txBody>
-                    <a:bodyPr/>
-                    <a:lstStyle/>
-                    <a:p>
-                      <a:pPr>
-                        <a:defRPr sz="1000"/>
-                      </a:pPr>
-                      <a:r>
-                        <a:t>Commercial</a:t>
-                      </a:r>
-                    </a:p>
-                  </a:txBody>
-                  <a:tcPr/>
-                </a:tc>
-                <a:tc>
-                  <a:txBody>
-                    <a:bodyPr/>
-                    <a:lstStyle/>
-                    <a:p>
-                      <a:pPr>
-                        <a:defRPr sz="1000"/>
-                      </a:pPr>
-                      <a:r>
-                        <a:t>88%</a:t>
-                      </a:r>
-                    </a:p>
-                  </a:txBody>
-                  <a:tcPr/>
-                </a:tc>
-                <a:tc>
-                  <a:txBody>
-                    <a:bodyPr/>
-                    <a:lstStyle/>
-                    <a:p>
-                      <a:pPr>
-                        <a:defRPr sz="1000"/>
-                      </a:pPr>
-                      <a:r>
-                        <a:t>105%</a:t>
-                      </a:r>
-                    </a:p>
-                  </a:txBody>
-                  <a:tcPr/>
-                </a:tc>
-                <a:tc>
-                  <a:txBody>
-                    <a:bodyPr/>
-                    <a:lstStyle/>
-                    <a:p>
-                      <a:pPr>
-                        <a:defRPr sz="1000"/>
-                      </a:pPr>
-                      <a:r>
-                        <a:t>12 days</a:t>
-                      </a:r>
-                    </a:p>
-                  </a:txBody>
-                  <a:tcPr/>
-                </a:tc>
-              </a:tr>
-              <a:tr h="347472">
-                <a:tc>
-                  <a:txBody>
-                    <a:bodyPr/>
-                    <a:lstStyle/>
-                    <a:p>
-                      <a:pPr>
-                        <a:defRPr sz="1000"/>
-                      </a:pPr>
-                      <a:r>
-                        <a:t>Sec-11</a:t>
-                      </a:r>
-                    </a:p>
-                  </a:txBody>
-                  <a:tcPr/>
-                </a:tc>
-                <a:tc>
-                  <a:txBody>
-                    <a:bodyPr/>
-                    <a:lstStyle/>
-                    <a:p>
-                      <a:pPr>
-                        <a:defRPr sz="1000"/>
-                      </a:pPr>
-                      <a:r>
-                        <a:t>91%</a:t>
-                      </a:r>
-                    </a:p>
-                  </a:txBody>
-                  <a:tcPr/>
-                </a:tc>
-                <a:tc>
-                  <a:txBody>
-                    <a:bodyPr/>
-                    <a:lstStyle/>
-                    <a:p>
-                      <a:pPr>
-                        <a:defRPr sz="1000"/>
-                      </a:pPr>
-                      <a:r>
-                        <a:t>111%</a:t>
-                      </a:r>
-                    </a:p>
-                  </a:txBody>
-                  <a:tcPr/>
-                </a:tc>
-                <a:tc>
-                  <a:txBody>
-                    <a:bodyPr/>
-                    <a:lstStyle/>
-                    <a:p>
-                      <a:pPr>
-                        <a:defRPr sz="1000"/>
-                      </a:pPr>
-                      <a:r>
-                        <a:t>Stage 11 Verified</a:t>
-                      </a:r>
-                    </a:p>
-                  </a:txBody>
-                  <a:tcPr/>
-                </a:tc>
-              </a:tr>
-            </a:tbl>
-          </a:graphicData>
-        </a:graphic>
-      </p:graphicFrame>
-      <p:pic>
-        <p:nvPicPr>
-          <p:cNvPr id="5" name="Picture 4" descr="image.png"/>
-          <p:cNvPicPr>
-            <a:picLocks noChangeAspect="1"/>
-          </p:cNvPicPr>
-          <p:nvPr/>
-        </p:nvPicPr>
-        <p:blipFill>
-          <a:blip r:embed="rId2"/>
-          <a:stretch>
-            <a:fillRect/>
-          </a:stretch>
-        </p:blipFill>
-        <p:spPr>
-          <a:xfrm>
-            <a:off x="6492240" y="3703320"/>
-            <a:ext cx="5120640" cy="1828800"/>
-          </a:xfrm>
-          <a:prstGeom prst="rect">
-            <a:avLst/>
-          </a:prstGeom>
-        </p:spPr>
-      </p:pic>
-    </p:spTree>
-  </p:cSld>
-  <p:clrMapOvr>
-    <a:masterClrMapping/>
-  </p:clrMapOvr>
-</p:sld>
-</file>
-
-<file path=ppt/slides/slide12.xml><?xml version="1.0" encoding="utf-8"?>
-<p:sld xmlns:a="http://schemas.openxmlformats.org/drawingml/2006/main" xmlns:p="http://schemas.openxmlformats.org/presentationml/2006/main" xmlns:r="http://schemas.openxmlformats.org/officeDocument/2006/relationships">
-  <p:cSld>
-    <p:spTree>
-      <p:nvGrpSpPr>
-        <p:cNvPr id="1" name=""/>
-        <p:cNvGrpSpPr/>
-        <p:nvPr/>
-      </p:nvGrpSpPr>
-      <p:grpSpPr/>
-      <p:sp>
-        <p:nvSpPr>
-          <p:cNvPr id="2" name="Title 1"/>
-          <p:cNvSpPr>
-            <a:spLocks noGrp="1"/>
-          </p:cNvSpPr>
-          <p:nvPr>
-            <p:ph type="title"/>
-          </p:nvPr>
-        </p:nvSpPr>
-        <p:spPr/>
-        <p:txBody>
-          <a:bodyPr/>
-          <a:lstStyle/>
-          <a:p>
-            <a:r>
-              <a:t>12. Appendix, Lineage &amp; Sign-off - Customer Health, Renewal and Expansi</a:t>
-            </a:r>
-          </a:p>
-        </p:txBody>
-      </p:sp>
-      <p:sp>
-        <p:nvSpPr>
-          <p:cNvPr id="3" name="Content Placeholder 2"/>
-          <p:cNvSpPr>
-            <a:spLocks noGrp="1"/>
-          </p:cNvSpPr>
-          <p:nvPr>
-            <p:ph idx="1"/>
-          </p:nvPr>
-        </p:nvSpPr>
-        <p:spPr/>
-        <p:txBody>
-          <a:bodyPr/>
-          <a:lstStyle/>
-          <a:p>
-            <a:r>
-              <a:t>Twelve-slide customer success review deck covering onboarding time-to-value, telemetry health scoring, save-play execution, and NRR expansion. Section 12 (Appendix, Lineage &amp; Sign-off) applies to Customer Success within Sales &amp; Marketing Knowledge Hub and is maintained by Tom Bergstrom. Records document lineage, governance metadata, version history, and owner sign-off.</a:t>
-            </a:r>
-          </a:p>
-          <a:p>
-            <a:pPr lvl="1"/>
-            <a:r>
-              <a:t>Highlights QBR expansion playbooks driving 114% net dollar retention.</a:t>
-            </a:r>
-          </a:p>
-          <a:p>
-            <a:pPr lvl="1"/>
-            <a:r>
-              <a:t>Tracks 30-day first-value milestone achievement across enterprise and mid-market cohorts.</a:t>
-            </a:r>
-          </a:p>
-          <a:p>
-            <a:pPr lvl="1"/>
-            <a:r>
-              <a:t>Section 12 review cadence is tracked by Tom Bergstrom under Customer Success governance.</a:t>
-            </a:r>
-          </a:p>
-        </p:txBody>
-      </p:sp>
-      <p:graphicFrame>
-        <p:nvGraphicFramePr>
-          <p:cNvPr id="4" name="Table 3"/>
-          <p:cNvGraphicFramePr>
-            <a:graphicFrameLocks noGrp="1"/>
-          </p:cNvGraphicFramePr>
-          <p:nvPr/>
-        </p:nvGraphicFramePr>
-        <p:xfrm>
-          <a:off x="548640" y="3749039"/>
-          <a:ext cx="5669280" cy="1737360"/>
-        </p:xfrm>
-        <a:graphic>
-          <a:graphicData uri="http://schemas.openxmlformats.org/drawingml/2006/table">
-            <a:tbl>
-              <a:tblPr firstRow="1" bandRow="1">
-                <a:tableStyleId>{5C22544A-7EE6-4342-B048-85BDC9FD1C3A}</a:tableStyleId>
-              </a:tblPr>
-              <a:tblGrid>
-                <a:gridCol w="1417320"/>
-                <a:gridCol w="1417320"/>
-                <a:gridCol w="1417320"/>
-                <a:gridCol w="1417320"/>
-              </a:tblGrid>
-              <a:tr h="347472">
-                <a:tc>
-                  <a:txBody>
-                    <a:bodyPr/>
-                    <a:lstStyle/>
-                    <a:p>
-                      <a:pPr>
-                        <a:defRPr b="1" sz="1100"/>
-                      </a:pPr>
-                      <a:r>
-                        <a:t>Segment</a:t>
-                      </a:r>
-                    </a:p>
-                  </a:txBody>
-                  <a:tcPr/>
-                </a:tc>
-                <a:tc>
-                  <a:txBody>
-                    <a:bodyPr/>
-                    <a:lstStyle/>
-                    <a:p>
-                      <a:pPr>
-                        <a:defRPr b="1" sz="1100"/>
-                      </a:pPr>
-                      <a:r>
-                        <a:t>Gross Retention</a:t>
-                      </a:r>
-                    </a:p>
-                  </a:txBody>
-                  <a:tcPr/>
-                </a:tc>
-                <a:tc>
-                  <a:txBody>
-                    <a:bodyPr/>
-                    <a:lstStyle/>
-                    <a:p>
-                      <a:pPr>
-                        <a:defRPr b="1" sz="1100"/>
-                      </a:pPr>
-                      <a:r>
-                        <a:t>Net Retention (NRR)</a:t>
-                      </a:r>
-                    </a:p>
-                  </a:txBody>
-                  <a:tcPr/>
-                </a:tc>
-                <a:tc>
-                  <a:txBody>
-                    <a:bodyPr/>
-                    <a:lstStyle/>
-                    <a:p>
-                      <a:pPr>
-                        <a:defRPr b="1" sz="1100"/>
-                      </a:pPr>
-                      <a:r>
-                        <a:t>Avg Time to Value</a:t>
-                      </a:r>
-                    </a:p>
-                  </a:txBody>
-                  <a:tcPr/>
-                </a:tc>
-              </a:tr>
-              <a:tr h="347472">
-                <a:tc>
-                  <a:txBody>
-                    <a:bodyPr/>
-                    <a:lstStyle/>
-                    <a:p>
-                      <a:pPr>
-                        <a:defRPr sz="1000"/>
-                      </a:pPr>
-                      <a:r>
-                        <a:t>Enterprise</a:t>
-                      </a:r>
-                    </a:p>
-                  </a:txBody>
-                  <a:tcPr/>
-                </a:tc>
-                <a:tc>
-                  <a:txBody>
-                    <a:bodyPr/>
-                    <a:lstStyle/>
-                    <a:p>
-                      <a:pPr>
-                        <a:defRPr sz="1000"/>
-                      </a:pPr>
-                      <a:r>
-                        <a:t>94%</a:t>
-                      </a:r>
-                    </a:p>
-                  </a:txBody>
-                  <a:tcPr/>
-                </a:tc>
-                <a:tc>
-                  <a:txBody>
-                    <a:bodyPr/>
-                    <a:lstStyle/>
-                    <a:p>
-                      <a:pPr>
-                        <a:defRPr sz="1000"/>
-                      </a:pPr>
-                      <a:r>
-                        <a:t>118%</a:t>
-                      </a:r>
-                    </a:p>
-                  </a:txBody>
-                  <a:tcPr/>
-                </a:tc>
-                <a:tc>
-                  <a:txBody>
-                    <a:bodyPr/>
-                    <a:lstStyle/>
-                    <a:p>
-                      <a:pPr>
-                        <a:defRPr sz="1000"/>
-                      </a:pPr>
-                      <a:r>
-                        <a:t>28 days</a:t>
-                      </a:r>
-                    </a:p>
-                  </a:txBody>
-                  <a:tcPr/>
-                </a:tc>
-              </a:tr>
-              <a:tr h="347472">
-                <a:tc>
-                  <a:txBody>
-                    <a:bodyPr/>
-                    <a:lstStyle/>
-                    <a:p>
-                      <a:pPr>
-                        <a:defRPr sz="1000"/>
-                      </a:pPr>
-                      <a:r>
-                        <a:t>Mid-Market</a:t>
-                      </a:r>
-                    </a:p>
-                  </a:txBody>
-                  <a:tcPr/>
-                </a:tc>
-                <a:tc>
-                  <a:txBody>
-                    <a:bodyPr/>
-                    <a:lstStyle/>
-                    <a:p>
-                      <a:pPr>
-                        <a:defRPr sz="1000"/>
-                      </a:pPr>
-                      <a:r>
-                        <a:t>91%</a:t>
-                      </a:r>
-                    </a:p>
-                  </a:txBody>
-                  <a:tcPr/>
-                </a:tc>
-                <a:tc>
-                  <a:txBody>
-                    <a:bodyPr/>
-                    <a:lstStyle/>
-                    <a:p>
-                      <a:pPr>
-                        <a:defRPr sz="1000"/>
-                      </a:pPr>
-                      <a:r>
-                        <a:t>111%</a:t>
-                      </a:r>
-                    </a:p>
-                  </a:txBody>
-                  <a:tcPr/>
-                </a:tc>
-                <a:tc>
-                  <a:txBody>
-                    <a:bodyPr/>
-                    <a:lstStyle/>
-                    <a:p>
-                      <a:pPr>
-                        <a:defRPr sz="1000"/>
-                      </a:pPr>
-                      <a:r>
-                        <a:t>19 days</a:t>
-                      </a:r>
-                    </a:p>
-                  </a:txBody>
-                  <a:tcPr/>
-                </a:tc>
-              </a:tr>
-              <a:tr h="347472">
-                <a:tc>
-                  <a:txBody>
-                    <a:bodyPr/>
-                    <a:lstStyle/>
-                    <a:p>
-                      <a:pPr>
-                        <a:defRPr sz="1000"/>
-                      </a:pPr>
-                      <a:r>
-                        <a:t>Commercial</a:t>
-                      </a:r>
-                    </a:p>
-                  </a:txBody>
-                  <a:tcPr/>
-                </a:tc>
-                <a:tc>
-                  <a:txBody>
-                    <a:bodyPr/>
-                    <a:lstStyle/>
-                    <a:p>
-                      <a:pPr>
-                        <a:defRPr sz="1000"/>
-                      </a:pPr>
-                      <a:r>
-                        <a:t>88%</a:t>
-                      </a:r>
-                    </a:p>
-                  </a:txBody>
-                  <a:tcPr/>
-                </a:tc>
-                <a:tc>
-                  <a:txBody>
-                    <a:bodyPr/>
-                    <a:lstStyle/>
-                    <a:p>
-                      <a:pPr>
-                        <a:defRPr sz="1000"/>
-                      </a:pPr>
-                      <a:r>
-                        <a:t>105%</a:t>
-                      </a:r>
-                    </a:p>
-                  </a:txBody>
-                  <a:tcPr/>
-                </a:tc>
-                <a:tc>
-                  <a:txBody>
-                    <a:bodyPr/>
-                    <a:lstStyle/>
-                    <a:p>
-                      <a:pPr>
-                        <a:defRPr sz="1000"/>
-                      </a:pPr>
-                      <a:r>
-                        <a:t>12 days</a:t>
-                      </a:r>
-                    </a:p>
-                  </a:txBody>
-                  <a:tcPr/>
-                </a:tc>
-              </a:tr>
-              <a:tr h="347472">
-                <a:tc>
-                  <a:txBody>
-                    <a:bodyPr/>
-                    <a:lstStyle/>
-                    <a:p>
-                      <a:pPr>
-                        <a:defRPr sz="1000"/>
-                      </a:pPr>
-                      <a:r>
-                        <a:t>Sec-12</a:t>
-                      </a:r>
-                    </a:p>
-                  </a:txBody>
-                  <a:tcPr/>
-                </a:tc>
-                <a:tc>
-                  <a:txBody>
-                    <a:bodyPr/>
-                    <a:lstStyle/>
-                    <a:p>
-                      <a:pPr>
-                        <a:defRPr sz="1000"/>
-                      </a:pPr>
-                      <a:r>
-                        <a:t>88%</a:t>
-                      </a:r>
-                    </a:p>
-                  </a:txBody>
-                  <a:tcPr/>
-                </a:tc>
-                <a:tc>
-                  <a:txBody>
-                    <a:bodyPr/>
-                    <a:lstStyle/>
-                    <a:p>
-                      <a:pPr>
-                        <a:defRPr sz="1000"/>
-                      </a:pPr>
-                      <a:r>
-                        <a:t>105%</a:t>
-                      </a:r>
-                    </a:p>
-                  </a:txBody>
-                  <a:tcPr/>
-                </a:tc>
-                <a:tc>
-                  <a:txBody>
-                    <a:bodyPr/>
-                    <a:lstStyle/>
-                    <a:p>
-                      <a:pPr>
-                        <a:defRPr sz="1000"/>
-                      </a:pPr>
-                      <a:r>
-                        <a:t>Stage 12 Verified</a:t>
                       </a:r>
                     </a:p>
                   </a:txBody>
